--- a/decks/triple-b5/triple-b5_ch4_prevention.pptx
+++ b/decks/triple-b5/triple-b5_ch4_prevention.pptx
@@ -125,30 +125,30 @@
   <p:extLst>
     <p:ext uri="{521415D9-36F7-43E2-AB2F-B90AF26B5E84}">
       <p14:sectionLst xmlns:p14="http://schemas.microsoft.com/office/powerpoint/2010/main">
-        <p14:section name="Opening" id="{1ca36497-e144-a70a-5ff8-5e96a57daa43}">
+        <p14:section name="Opening" id="{4571f86c-0b3c-7b4a-f801-fa8d47ad77f0}">
           <p14:sldIdLst>
             <p14:sldId id="256"/>
           </p14:sldIdLst>
         </p14:section>
-        <p14:section name="Gate" id="{ca9487aa-1e71-374e-2f70-5f86e3230d38}">
+        <p14:section name="Gate" id="{61c48ac8-e8a8-18ad-2a72-e12d7b16a651}">
           <p14:sldIdLst>
             <p14:sldId id="257"/>
             <p14:sldId id="258"/>
           </p14:sldIdLst>
         </p14:section>
-        <p14:section name="Pre-teach" id="{4bc6c539-57a0-208c-82e4-90c88704fb2f}">
+        <p14:section name="Pre-teach" id="{87c2d0ac-9d74-5d9f-5267-12f6d2ef3853}">
           <p14:sldIdLst>
             <p14:sldId id="259"/>
             <p14:sldId id="260"/>
           </p14:sldIdLst>
         </p14:section>
-        <p14:section name="Read-along" id="{e9f30179-2177-a5ed-1ef4-849ca94f59d7}">
+        <p14:section name="Read-along" id="{79f45685-1cc6-cde2-d0d9-7f18e75c538a}">
           <p14:sldIdLst>
             <p14:sldId id="261"/>
             <p14:sldId id="262"/>
           </p14:sldIdLst>
         </p14:section>
-        <p14:section name="Teach" id="{706b34df-1611-5c72-2bfe-dd352595a6fd}">
+        <p14:section name="Teach" id="{a4316015-cbbe-543a-9c46-8e3aff83f8e6}">
           <p14:sldIdLst>
             <p14:sldId id="263"/>
             <p14:sldId id="264"/>
@@ -156,7 +156,7 @@
             <p14:sldId id="266"/>
           </p14:sldIdLst>
         </p14:section>
-        <p14:section name="Routes" id="{26f80fc0-c620-a383-2a14-a98cf0bd2943}">
+        <p14:section name="Routes" id="{cdcbe918-f6e1-2548-eebd-883bfe814fc0}">
           <p14:sldIdLst>
             <p14:sldId id="267"/>
             <p14:sldId id="268"/>
@@ -164,12 +164,12 @@
             <p14:sldId id="270"/>
           </p14:sldIdLst>
         </p14:section>
-        <p14:section name="Close" id="{1c000e78-2171-ee73-29bc-e2763eb7ecb0}">
+        <p14:section name="Close" id="{5fa952a7-37bf-6187-aabd-2b741a2b3907}">
           <p14:sldIdLst>
             <p14:sldId id="271"/>
           </p14:sldIdLst>
         </p14:section>
-        <p14:section name="Answers" id="{1d101eda-6a6d-22bd-9555-e3ba3081b4d8}">
+        <p14:section name="Answers" id="{f2c26fba-477d-9513-d9ff-53d5d9d6d867}">
           <p14:sldIdLst>
             <p14:sldId id="272"/>
             <p14:sldId id="273"/>
@@ -1233,7 +1233,7 @@
               <a:rPr lang="en-US" dirty="0"/>
               <a:t>Exit ticket — individual, silent, on a slip or mini-whiteboard. Recall before help: no notes, no lanes, no hints. Collect before pupils leave.
 Question: What did Ignaz Semmelweis show?
-Answer: D   Washing hands between patients reduced the spread of disease in hospitals. Semmelweis made doctors wash their hands, and deaths after childbirth fell sharply. Hand washing stops pathogens being carried from patient to patient.
+Answer: A   Washing hands between patients reduced the spread of disease in hospitals. Semmelweis made doctors wash their hands, and deaths after childbirth fell sharply. Hand washing stops pathogens being carried from patient to patient.
 Source of this question: gate item 1 re-asked (options rotated) — this chapter has no third quick-check module.
 The ebook also holds task 3, "Stopping a cholera outbreak (6 marks)", for homework or the next lesson's do now.
 Sort the slips: correct → ready to move on; incorrect → start next lesson in the pre-teach group, with the read-along and the Support lane. Same destination next time.</a:t>
@@ -1325,7 +1325,7 @@
             <a:r>
               <a:rPr lang="en-US" dirty="0"/>
               <a:t>Answers — task 1: Which method is this?. Reveal the answer; pupils mark their own work in a different colour, then read the "why" together. Same destination for every lane, so one answer serves the whole class.
-Answer: A   Isolation
+Answer: D   Isolation
 Why: Isolation keeps a person with a serious infectious disease away from others, so fewer people come into contact with the pathogen and it spreads to fewer people.
 Ask a Support pupil to explain one step, and a Stretch pupil to share their extension.</a:t>
             </a:r>
@@ -1507,7 +1507,7 @@
             <a:r>
               <a:rPr lang="en-US" dirty="0"/>
               <a:t>Answers — exit ticket: Exit ticket. Reveal the answer; pupils mark their own work in a different colour, then read the "why" together. Same destination for every lane, so one answer serves the whole class.
-Answer: D   Washing hands between patients reduced the spread of disease in hospitals
+Answer: A   Washing hands between patients reduced the spread of disease in hospitals
 Why: Semmelweis made doctors wash their hands, and deaths after childbirth fell sharply. Hand washing stops pathogens being carried from patient to patient.
 Ask a Support pupil to explain one step, and a Stretch pupil to share their extension.</a:t>
             </a:r>
@@ -1598,7 +1598,7 @@
             <a:r>
               <a:rPr lang="en-US" dirty="0"/>
               <a:t>Do now — retrieval. Silent, no notes, no help: recall comes before any support. Give about four minutes.
-1. What did Ignaz Semmelweis show?  →  A   Washing hands between patients reduced the spread of disease in hospitals
+1. What did Ignaz Semmelweis show?  →  B   Washing hands between patients reduced the spread of disease in hospitals
 2. Keeping a person with a serious infectious disease away from other people is called ___.  →  isolation
 3. Why can plants not be protected by vaccination?  →  A   Plants do not have an immune system
 Circulate: who gets 3/3 (Stretch route), 2/3 (Core), 0–1 (Support)? Use this to route pupils later in the lesson.</a:t>
@@ -1690,7 +1690,7 @@
             <a:r>
               <a:rPr lang="en-US" dirty="0"/>
               <a:t>Answers — pupils mark their own in a different colour, then hands up for 3/3, 2/3, 1/3.
-1. A   Washing hands between patients reduced the spread of disease in hospitals. Semmelweis made doctors wash their hands, and deaths after childbirth fell sharply. Hand washing stops pathogens being carried from patient to patient.
+1. B   Washing hands between patients reduced the spread of disease in hospitals. Semmelweis made doctors wash their hands, and deaths after childbirth fell sharply. Hand washing stops pathogens being carried from patient to patient.
 2. isolation. Isolation means fewer people come into contact with the infected person, so the pathogen spreads to fewer people.
 3. A   Plants do not have an immune system. A vaccine works by training the immune system. Plants have no immune system, so plant diseases are controlled by hygiene, destroying infected plants and controlling vectors.
 Say the route each score points to: 3/3 Stretch, 2/3 Core, 0–1 Support. Pupils may choose to move up.</a:t>
@@ -5387,7 +5387,7 @@
                 <a:ea typeface="Calibri" pitchFamily="34" charset="-122"/>
                 <a:cs typeface="Calibri" pitchFamily="34" charset="-120"/>
               </a:rPr>
-              <a:t>Isolation      </a:t>
+              <a:t>Hygiene      </a:t>
             </a:r>
             <a:pPr algn="ctr" indent="0" marL="0">
               <a:buNone/>
@@ -5471,7 +5471,7 @@
                 <a:ea typeface="Calibri" pitchFamily="34" charset="-122"/>
                 <a:cs typeface="Calibri" pitchFamily="34" charset="-120"/>
               </a:rPr>
-              <a:t>Hygiene</a:t>
+              <a:t>Isolation</a:t>
             </a:r>
             <a:endParaRPr lang="en-US" sz="2600" dirty="0"/>
           </a:p>
@@ -9195,7 +9195,7 @@
                 <a:ea typeface="Calibri" pitchFamily="34" charset="-122"/>
                 <a:cs typeface="Calibri" pitchFamily="34" charset="-120"/>
               </a:rPr>
-              <a:t>Mosquitoes carry the pathogen that causes malaria</a:t>
+              <a:t>Washing hands between patients reduced the spread of disease in hospitals</a:t>
             </a:r>
             <a:endParaRPr lang="en-US" sz="2400" dirty="0"/>
           </a:p>
@@ -9232,7 +9232,7 @@
                 <a:ea typeface="Calibri" pitchFamily="34" charset="-122"/>
                 <a:cs typeface="Calibri" pitchFamily="34" charset="-120"/>
               </a:rPr>
-              <a:t>Vaccination protects children against measles</a:t>
+              <a:t>Viruses are smaller than bacteria</a:t>
             </a:r>
             <a:endParaRPr lang="en-US" sz="2400" dirty="0"/>
           </a:p>
@@ -9269,7 +9269,7 @@
                 <a:ea typeface="Calibri" pitchFamily="34" charset="-122"/>
                 <a:cs typeface="Calibri" pitchFamily="34" charset="-120"/>
               </a:rPr>
-              <a:t>Viruses are smaller than bacteria</a:t>
+              <a:t>Vaccination protects children against measles</a:t>
             </a:r>
             <a:endParaRPr lang="en-US" sz="2400" dirty="0"/>
           </a:p>
@@ -9306,7 +9306,7 @@
                 <a:ea typeface="Calibri" pitchFamily="34" charset="-122"/>
                 <a:cs typeface="Calibri" pitchFamily="34" charset="-120"/>
               </a:rPr>
-              <a:t>Washing hands between patients reduced the spread of disease in hospitals</a:t>
+              <a:t>Mosquitoes carry the pathogen that causes malaria</a:t>
             </a:r>
             <a:endParaRPr lang="en-US" sz="2400" dirty="0"/>
           </a:p>
@@ -9711,7 +9711,7 @@
                 <a:ea typeface="Cambria" pitchFamily="34" charset="-122"/>
                 <a:cs typeface="Cambria" pitchFamily="34" charset="-120"/>
               </a:rPr>
-              <a:t>A   Isolation</a:t>
+              <a:t>D   Isolation</a:t>
             </a:r>
             <a:endParaRPr lang="en-US" sz="1800" dirty="0"/>
           </a:p>
@@ -10740,7 +10740,7 @@
                 <a:ea typeface="Cambria" pitchFamily="34" charset="-122"/>
                 <a:cs typeface="Cambria" pitchFamily="34" charset="-120"/>
               </a:rPr>
-              <a:t>D   Washing hands between patients reduced the spread of disease in hospitals</a:t>
+              <a:t>A   Washing hands between patients reduced the spread of disease in hospitals</a:t>
             </a:r>
             <a:endParaRPr lang="en-US" sz="1800" dirty="0"/>
           </a:p>
@@ -11274,7 +11274,7 @@
                 <a:ea typeface="Calibri" pitchFamily="34" charset="-122"/>
                 <a:cs typeface="Calibri" pitchFamily="34" charset="-120"/>
               </a:rPr>
-              <a:t>Washing hands between patients reduced the spread of disease in hospitals</a:t>
+              <a:t>Mosquitoes carry the pathogen that causes malaria</a:t>
             </a:r>
             <a:endParaRPr lang="en-US" sz="1800" dirty="0"/>
           </a:p>
@@ -11311,7 +11311,7 @@
                 <a:ea typeface="Calibri" pitchFamily="34" charset="-122"/>
                 <a:cs typeface="Calibri" pitchFamily="34" charset="-120"/>
               </a:rPr>
-              <a:t>Mosquitoes carry the pathogen that causes malaria</a:t>
+              <a:t>Washing hands between patients reduced the spread of disease in hospitals</a:t>
             </a:r>
             <a:endParaRPr lang="en-US" sz="1800" dirty="0"/>
           </a:p>
@@ -11348,7 +11348,7 @@
                 <a:ea typeface="Calibri" pitchFamily="34" charset="-122"/>
                 <a:cs typeface="Calibri" pitchFamily="34" charset="-120"/>
               </a:rPr>
-              <a:t>Vaccination protects children against measles</a:t>
+              <a:t>Viruses are smaller than bacteria</a:t>
             </a:r>
             <a:endParaRPr lang="en-US" sz="1800" dirty="0"/>
           </a:p>
@@ -11385,7 +11385,7 @@
                 <a:ea typeface="Calibri" pitchFamily="34" charset="-122"/>
                 <a:cs typeface="Calibri" pitchFamily="34" charset="-120"/>
               </a:rPr>
-              <a:t>Viruses are smaller than bacteria</a:t>
+              <a:t>Vaccination protects children against measles</a:t>
             </a:r>
             <a:endParaRPr lang="en-US" sz="1800" dirty="0"/>
           </a:p>
@@ -11824,7 +11824,7 @@
                 <a:ea typeface="Calibri" pitchFamily="34" charset="-122"/>
                 <a:cs typeface="Calibri" pitchFamily="34" charset="-120"/>
               </a:rPr>
-              <a:t>Plants are never infected by pathogens</a:t>
+              <a:t>Plants are too small to inject</a:t>
             </a:r>
             <a:endParaRPr lang="en-US" sz="2000" dirty="0"/>
           </a:p>
@@ -11861,7 +11861,7 @@
                 <a:ea typeface="Calibri" pitchFamily="34" charset="-122"/>
                 <a:cs typeface="Calibri" pitchFamily="34" charset="-120"/>
               </a:rPr>
-              <a:t>Plants are too small to inject</a:t>
+              <a:t>Pathogens cannot reach plants in a field</a:t>
             </a:r>
             <a:endParaRPr lang="en-US" sz="2000" dirty="0"/>
           </a:p>
@@ -11898,7 +11898,7 @@
                 <a:ea typeface="Calibri" pitchFamily="34" charset="-122"/>
                 <a:cs typeface="Calibri" pitchFamily="34" charset="-120"/>
               </a:rPr>
-              <a:t>Pathogens cannot reach plants in a field</a:t>
+              <a:t>Plants are never infected by pathogens</a:t>
             </a:r>
             <a:endParaRPr lang="en-US" sz="2000" dirty="0"/>
           </a:p>
@@ -12299,7 +12299,7 @@
                 <a:ea typeface="Calibri" pitchFamily="34" charset="-122"/>
                 <a:cs typeface="Calibri" pitchFamily="34" charset="-120"/>
               </a:rPr>
-              <a:t>A   Washing hands between patients reduced the spread of disease in hospitals</a:t>
+              <a:t>B   Washing hands between patients reduced the spread of disease in hospitals</a:t>
             </a:r>
             <a:endParaRPr lang="en-US" sz="2200" dirty="0"/>
           </a:p>

--- a/decks/triple-b5/triple-b5_ch4_prevention.pptx
+++ b/decks/triple-b5/triple-b5_ch4_prevention.pptx
@@ -125,30 +125,30 @@
   <p:extLst>
     <p:ext uri="{521415D9-36F7-43E2-AB2F-B90AF26B5E84}">
       <p14:sectionLst xmlns:p14="http://schemas.microsoft.com/office/powerpoint/2010/main">
-        <p14:section name="Opening" id="{4571f86c-0b3c-7b4a-f801-fa8d47ad77f0}">
+        <p14:section name="Opening" id="{db83e0fd-f5ba-fea2-0d85-d11743669ad6}">
           <p14:sldIdLst>
             <p14:sldId id="256"/>
           </p14:sldIdLst>
         </p14:section>
-        <p14:section name="Gate" id="{61c48ac8-e8a8-18ad-2a72-e12d7b16a651}">
+        <p14:section name="Gate" id="{12d214cf-95da-a2ae-244c-dfafb960ebfa}">
           <p14:sldIdLst>
             <p14:sldId id="257"/>
             <p14:sldId id="258"/>
           </p14:sldIdLst>
         </p14:section>
-        <p14:section name="Pre-teach" id="{87c2d0ac-9d74-5d9f-5267-12f6d2ef3853}">
+        <p14:section name="Pre-teach" id="{a98944b2-63ff-74b5-8cae-cefbbb6fcca4}">
           <p14:sldIdLst>
             <p14:sldId id="259"/>
             <p14:sldId id="260"/>
           </p14:sldIdLst>
         </p14:section>
-        <p14:section name="Read-along" id="{79f45685-1cc6-cde2-d0d9-7f18e75c538a}">
+        <p14:section name="Read-along" id="{3e5bda94-3e18-7283-3001-ca3b96e7b305}">
           <p14:sldIdLst>
             <p14:sldId id="261"/>
             <p14:sldId id="262"/>
           </p14:sldIdLst>
         </p14:section>
-        <p14:section name="Teach" id="{a4316015-cbbe-543a-9c46-8e3aff83f8e6}">
+        <p14:section name="Teach" id="{b1add9a4-2f81-960f-4877-aeec5af297d0}">
           <p14:sldIdLst>
             <p14:sldId id="263"/>
             <p14:sldId id="264"/>
@@ -156,7 +156,7 @@
             <p14:sldId id="266"/>
           </p14:sldIdLst>
         </p14:section>
-        <p14:section name="Routes" id="{cdcbe918-f6e1-2548-eebd-883bfe814fc0}">
+        <p14:section name="Routes" id="{3d6adf26-fb4b-d97e-a1d0-d871ce8238d8}">
           <p14:sldIdLst>
             <p14:sldId id="267"/>
             <p14:sldId id="268"/>
@@ -164,12 +164,12 @@
             <p14:sldId id="270"/>
           </p14:sldIdLst>
         </p14:section>
-        <p14:section name="Close" id="{5fa952a7-37bf-6187-aabd-2b741a2b3907}">
+        <p14:section name="Close" id="{b4fbf574-d6e8-4649-d7b0-b773b7855109}">
           <p14:sldIdLst>
             <p14:sldId id="271"/>
           </p14:sldIdLst>
         </p14:section>
-        <p14:section name="Answers" id="{f2c26fba-477d-9513-d9ff-53d5d9d6d867}">
+        <p14:section name="Answers" id="{5b66f1f3-7f24-2511-dbf1-a474c7ff1fe5}">
           <p14:sldIdLst>
             <p14:sldId id="272"/>
             <p14:sldId id="273"/>
